--- a/lectures/08-Loglin2.pptx
+++ b/lectures/08-Loglin2.pptx
@@ -5343,7 +5343,7 @@
               <a:t>The </a:t>
             </a:r>
             <a:r>
-              <a:rPr lang="en-CA" sz="2000" dirty="0">
+              <a:rPr lang="en-CA" sz="2000" b="1" dirty="0">
                 <a:latin typeface="Courier New" panose="02070309020205020404" pitchFamily="49" charset="0"/>
                 <a:cs typeface="Courier New" panose="02070309020205020404" pitchFamily="49" charset="0"/>
               </a:rPr>
@@ -8880,6 +8880,18 @@
   <p:clrMapOvr>
     <a:masterClrMapping/>
   </p:clrMapOvr>
+  <mc:AlternateContent xmlns:mc="http://schemas.openxmlformats.org/markup-compatibility/2006">
+    <mc:Choice xmlns:p14="http://schemas.microsoft.com/office/powerpoint/2010/main" Requires="p14">
+      <p:transition spd="slow" p14:dur="2000">
+        <p14:prism isContent="1"/>
+      </p:transition>
+    </mc:Choice>
+    <mc:Fallback>
+      <p:transition spd="slow">
+        <p:fade/>
+      </p:transition>
+    </mc:Fallback>
+  </mc:AlternateContent>
 </p:sld>
 </file>
 
@@ -9121,18 +9133,6 @@
   <p:clrMapOvr>
     <a:masterClrMapping/>
   </p:clrMapOvr>
-  <mc:AlternateContent xmlns:mc="http://schemas.openxmlformats.org/markup-compatibility/2006" xmlns:p14="http://schemas.microsoft.com/office/powerpoint/2010/main">
-    <mc:Choice Requires="p14">
-      <p:transition spd="slow" p14:dur="2000">
-        <p14:prism isContent="1"/>
-      </p:transition>
-    </mc:Choice>
-    <mc:Fallback xmlns="">
-      <p:transition spd="slow">
-        <p:fade/>
-      </p:transition>
-    </mc:Fallback>
-  </mc:AlternateContent>
   <p:timing>
     <p:tnLst>
       <p:par>
@@ -9567,7 +9567,7 @@
               <a:rPr lang="en-CA" dirty="0">
                 <a:sym typeface="Symbol" panose="05050102010706020507" pitchFamily="18" charset="2"/>
               </a:rPr>
-              <a:t>Fewer parameters  easier interpretation</a:t>
+              <a:t>Fewer parameters  simpler interpretation</a:t>
             </a:r>
           </a:p>
           <a:p>
@@ -12712,6 +12712,42 @@
           </a:p>
         </p:txBody>
       </p:sp>
+      <p:sp>
+        <p:nvSpPr>
+          <p:cNvPr id="4" name="TextBox 3">
+            <a:extLst>
+              <a:ext uri="{FF2B5EF4-FFF2-40B4-BE49-F238E27FC236}">
+                <a16:creationId xmlns:a16="http://schemas.microsoft.com/office/drawing/2014/main" id="{DE1D7D64-E6EB-9D0E-9059-87C133524E28}"/>
+              </a:ext>
+            </a:extLst>
+          </p:cNvPr>
+          <p:cNvSpPr txBox="1"/>
+          <p:nvPr/>
+        </p:nvSpPr>
+        <p:spPr>
+          <a:xfrm>
+            <a:off x="116831" y="3544598"/>
+            <a:ext cx="1569469" cy="307777"/>
+          </a:xfrm>
+          <a:prstGeom prst="rect">
+            <a:avLst/>
+          </a:prstGeom>
+          <a:noFill/>
+        </p:spPr>
+        <p:txBody>
+          <a:bodyPr wrap="square" rtlCol="0">
+            <a:spAutoFit/>
+          </a:bodyPr>
+          <a:lstStyle/>
+          <a:p>
+            <a:pPr algn="ctr"/>
+            <a:r>
+              <a:rPr lang="en-CA" sz="1400" dirty="0"/>
+              <a:t>Independence</a:t>
+            </a:r>
+          </a:p>
+        </p:txBody>
+      </p:sp>
     </p:spTree>
     <p:extLst>
       <p:ext uri="{BB962C8B-B14F-4D97-AF65-F5344CB8AC3E}">
@@ -18499,12 +18535,19 @@
               <a:t>Fit the RC(1) and RC(2) model by adding terms using </a:t>
             </a:r>
             <a:r>
-              <a:rPr lang="en-US" dirty="0" err="1"/>
-              <a:t>Mult</a:t>
+              <a:rPr lang="en-US" b="1" dirty="0">
+                <a:solidFill>
+                  <a:schemeClr val="accent6">
+                    <a:lumMod val="50000"/>
+                  </a:schemeClr>
+                </a:solidFill>
+                <a:latin typeface="Aptos Mono" panose="020B0009020202020204" pitchFamily="49" charset="0"/>
+              </a:rPr>
+              <a:t>Mult() </a:t>
             </a:r>
             <a:r>
               <a:rPr lang="en-US" dirty="0"/>
-              <a:t>() to the independence model</a:t>
+              <a:t>to the independence model</a:t>
             </a:r>
           </a:p>
         </p:txBody>
@@ -24351,6 +24394,41 @@
                 <a:cs typeface="Courier New" panose="02070309020205020404" pitchFamily="49" charset="0"/>
               </a:rPr>
               <a:t>))</a:t>
+            </a:r>
+          </a:p>
+        </p:txBody>
+      </p:sp>
+      <p:sp>
+        <p:nvSpPr>
+          <p:cNvPr id="6" name="TextBox 5">
+            <a:extLst>
+              <a:ext uri="{FF2B5EF4-FFF2-40B4-BE49-F238E27FC236}">
+                <a16:creationId xmlns:a16="http://schemas.microsoft.com/office/drawing/2014/main" id="{2D963868-D975-7CD1-18DD-B78B9D6FFE69}"/>
+              </a:ext>
+            </a:extLst>
+          </p:cNvPr>
+          <p:cNvSpPr txBox="1"/>
+          <p:nvPr/>
+        </p:nvSpPr>
+        <p:spPr>
+          <a:xfrm>
+            <a:off x="609600" y="6019800"/>
+            <a:ext cx="8077200" cy="338554"/>
+          </a:xfrm>
+          <a:prstGeom prst="rect">
+            <a:avLst/>
+          </a:prstGeom>
+          <a:noFill/>
+        </p:spPr>
+        <p:txBody>
+          <a:bodyPr wrap="square" rtlCol="0">
+            <a:spAutoFit/>
+          </a:bodyPr>
+          <a:lstStyle/>
+          <a:p>
+            <a:r>
+              <a:rPr lang="en-CA" sz="1600" dirty="0"/>
+              <a:t>Crossings: perhaps different difficulty crossing from one level to the next</a:t>
             </a:r>
           </a:p>
         </p:txBody>
@@ -25987,12 +26065,30 @@
               <a:t>Collect the models in a </a:t>
             </a:r>
             <a:r>
-              <a:rPr lang="en-CA" dirty="0" err="1"/>
+              <a:rPr lang="en-CA" b="1" dirty="0" err="1">
+                <a:solidFill>
+                  <a:schemeClr val="accent6">
+                    <a:lumMod val="50000"/>
+                  </a:schemeClr>
+                </a:solidFill>
+                <a:latin typeface="Aptos Mono" panose="020B0009020202020204" pitchFamily="49" charset="0"/>
+              </a:rPr>
               <a:t>glmlist</a:t>
             </a:r>
             <a:r>
+              <a:rPr lang="en-CA" b="1" dirty="0">
+                <a:solidFill>
+                  <a:schemeClr val="accent6">
+                    <a:lumMod val="50000"/>
+                  </a:schemeClr>
+                </a:solidFill>
+                <a:latin typeface="Aptos Mono" panose="020B0009020202020204" pitchFamily="49" charset="0"/>
+              </a:rPr>
+              <a:t>() </a:t>
+            </a:r>
+            <a:r>
               <a:rPr lang="en-CA" dirty="0"/>
-              <a:t>() and compare them using </a:t>
+              <a:t>and compare them using </a:t>
             </a:r>
             <a:r>
               <a:rPr lang="en-CA" dirty="0" err="1"/>
@@ -31375,7 +31471,11 @@
             </a:r>
             <a:r>
               <a:rPr lang="en-US" dirty="0" err="1"/>
-              <a:t>diffce</a:t>
+              <a:t>diff</a:t>
+            </a:r>
+            <a:r>
+              <a:rPr lang="en-US" baseline="30000" dirty="0" err="1"/>
+              <a:t>ce</a:t>
             </a:r>
             <a:r>
               <a:rPr lang="en-US" dirty="0"/>
